--- a/slides/TP557_11_Métricas_de_Classificação.pptx
+++ b/slides/TP557_11_Métricas_de_Classificação.pptx
@@ -14,9 +14,9 @@
     <p:sldId id="256" r:id="rId2"/>
     <p:sldId id="406" r:id="rId3"/>
     <p:sldId id="456" r:id="rId4"/>
-    <p:sldId id="472" r:id="rId5"/>
-    <p:sldId id="459" r:id="rId6"/>
-    <p:sldId id="473" r:id="rId7"/>
+    <p:sldId id="473" r:id="rId5"/>
+    <p:sldId id="472" r:id="rId6"/>
+    <p:sldId id="459" r:id="rId7"/>
     <p:sldId id="461" r:id="rId8"/>
     <p:sldId id="462" r:id="rId9"/>
     <p:sldId id="474" r:id="rId10"/>
@@ -302,7 +302,7 @@
           <a:p>
             <a:fld id="{144F1436-6906-4D93-B7A2-786C327BFA14}" type="datetimeFigureOut">
               <a:rPr lang="nl-BE" smtClean="0"/>
-              <a:t>6/10/2023</a:t>
+              <a:t>7/05/2025</a:t>
             </a:fld>
             <a:endParaRPr lang="nl-BE"/>
           </a:p>
@@ -368,7 +368,7 @@
           <a:p>
             <a:fld id="{F7E56D9B-79AD-444A-AFED-DEC23408F8B4}" type="slidenum">
               <a:rPr lang="nl-BE" smtClean="0"/>
-              <a:t>‹nº›</a:t>
+              <a:t>‹#›</a:t>
             </a:fld>
             <a:endParaRPr lang="nl-BE"/>
           </a:p>
@@ -467,7 +467,7 @@
           <a:p>
             <a:fld id="{AA8CD09E-2914-4F47-B6C1-51B2C31814C9}" type="datetimeFigureOut">
               <a:rPr lang="pt-BR" smtClean="0"/>
-              <a:t>06/10/2023</a:t>
+              <a:t>07/05/2025</a:t>
             </a:fld>
             <a:endParaRPr lang="pt-BR"/>
           </a:p>
@@ -625,7 +625,7 @@
           <a:p>
             <a:fld id="{6FC8D850-966F-45A6-8DE7-15B891E7D40D}" type="slidenum">
               <a:rPr lang="pt-BR" smtClean="0"/>
-              <a:t>‹nº›</a:t>
+              <a:t>‹#›</a:t>
             </a:fld>
             <a:endParaRPr lang="pt-BR"/>
           </a:p>
@@ -1316,7 +1316,7 @@
     </p:spTree>
     <p:extLst>
       <p:ext uri="{BB962C8B-B14F-4D97-AF65-F5344CB8AC3E}">
-        <p14:creationId xmlns:p14="http://schemas.microsoft.com/office/powerpoint/2010/main" val="1326122716"/>
+        <p14:creationId xmlns:p14="http://schemas.microsoft.com/office/powerpoint/2010/main" val="3217873621"/>
       </p:ext>
     </p:extLst>
   </p:cSld>
@@ -1516,7 +1516,7 @@
           <a:p>
             <a:fld id="{6FC8D850-966F-45A6-8DE7-15B891E7D40D}" type="slidenum">
               <a:rPr lang="pt-BR" smtClean="0"/>
-              <a:t>6</a:t>
+              <a:t>5</a:t>
             </a:fld>
             <a:endParaRPr lang="pt-BR"/>
           </a:p>
@@ -1525,7 +1525,7 @@
     </p:spTree>
     <p:extLst>
       <p:ext uri="{BB962C8B-B14F-4D97-AF65-F5344CB8AC3E}">
-        <p14:creationId xmlns:p14="http://schemas.microsoft.com/office/powerpoint/2010/main" val="3217873621"/>
+        <p14:creationId xmlns:p14="http://schemas.microsoft.com/office/powerpoint/2010/main" val="1326122716"/>
       </p:ext>
     </p:extLst>
   </p:cSld>
@@ -2380,7 +2380,7 @@
           <a:p>
             <a:fld id="{63289F7E-B80B-496E-81B4-D396C37C9454}" type="datetimeFigureOut">
               <a:rPr lang="pt-BR" smtClean="0"/>
-              <a:t>06/10/2023</a:t>
+              <a:t>07/05/2025</a:t>
             </a:fld>
             <a:endParaRPr lang="pt-BR"/>
           </a:p>
@@ -2434,7 +2434,7 @@
           <a:p>
             <a:fld id="{1A7E88B7-70CE-4035-AE73-13FA6FB985D4}" type="slidenum">
               <a:rPr lang="pt-BR" smtClean="0"/>
-              <a:t>‹nº›</a:t>
+              <a:t>‹#›</a:t>
             </a:fld>
             <a:endParaRPr lang="pt-BR"/>
           </a:p>
@@ -2578,7 +2578,7 @@
           <a:p>
             <a:fld id="{63289F7E-B80B-496E-81B4-D396C37C9454}" type="datetimeFigureOut">
               <a:rPr lang="pt-BR" smtClean="0"/>
-              <a:t>06/10/2023</a:t>
+              <a:t>07/05/2025</a:t>
             </a:fld>
             <a:endParaRPr lang="pt-BR"/>
           </a:p>
@@ -2632,7 +2632,7 @@
           <a:p>
             <a:fld id="{1A7E88B7-70CE-4035-AE73-13FA6FB985D4}" type="slidenum">
               <a:rPr lang="pt-BR" smtClean="0"/>
-              <a:t>‹nº›</a:t>
+              <a:t>‹#›</a:t>
             </a:fld>
             <a:endParaRPr lang="pt-BR"/>
           </a:p>
@@ -2786,7 +2786,7 @@
           <a:p>
             <a:fld id="{63289F7E-B80B-496E-81B4-D396C37C9454}" type="datetimeFigureOut">
               <a:rPr lang="pt-BR" smtClean="0"/>
-              <a:t>06/10/2023</a:t>
+              <a:t>07/05/2025</a:t>
             </a:fld>
             <a:endParaRPr lang="pt-BR"/>
           </a:p>
@@ -2840,7 +2840,7 @@
           <a:p>
             <a:fld id="{1A7E88B7-70CE-4035-AE73-13FA6FB985D4}" type="slidenum">
               <a:rPr lang="pt-BR" smtClean="0"/>
-              <a:t>‹nº›</a:t>
+              <a:t>‹#›</a:t>
             </a:fld>
             <a:endParaRPr lang="pt-BR"/>
           </a:p>
@@ -2984,7 +2984,7 @@
           <a:p>
             <a:fld id="{63289F7E-B80B-496E-81B4-D396C37C9454}" type="datetimeFigureOut">
               <a:rPr lang="pt-BR" smtClean="0"/>
-              <a:t>06/10/2023</a:t>
+              <a:t>07/05/2025</a:t>
             </a:fld>
             <a:endParaRPr lang="pt-BR"/>
           </a:p>
@@ -3038,7 +3038,7 @@
           <a:p>
             <a:fld id="{1A7E88B7-70CE-4035-AE73-13FA6FB985D4}" type="slidenum">
               <a:rPr lang="pt-BR" smtClean="0"/>
-              <a:t>‹nº›</a:t>
+              <a:t>‹#›</a:t>
             </a:fld>
             <a:endParaRPr lang="pt-BR"/>
           </a:p>
@@ -3259,7 +3259,7 @@
           <a:p>
             <a:fld id="{63289F7E-B80B-496E-81B4-D396C37C9454}" type="datetimeFigureOut">
               <a:rPr lang="pt-BR" smtClean="0"/>
-              <a:t>06/10/2023</a:t>
+              <a:t>07/05/2025</a:t>
             </a:fld>
             <a:endParaRPr lang="pt-BR"/>
           </a:p>
@@ -3313,7 +3313,7 @@
           <a:p>
             <a:fld id="{1A7E88B7-70CE-4035-AE73-13FA6FB985D4}" type="slidenum">
               <a:rPr lang="pt-BR" smtClean="0"/>
-              <a:t>‹nº›</a:t>
+              <a:t>‹#›</a:t>
             </a:fld>
             <a:endParaRPr lang="pt-BR"/>
           </a:p>
@@ -3524,7 +3524,7 @@
           <a:p>
             <a:fld id="{63289F7E-B80B-496E-81B4-D396C37C9454}" type="datetimeFigureOut">
               <a:rPr lang="pt-BR" smtClean="0"/>
-              <a:t>06/10/2023</a:t>
+              <a:t>07/05/2025</a:t>
             </a:fld>
             <a:endParaRPr lang="pt-BR"/>
           </a:p>
@@ -3578,7 +3578,7 @@
           <a:p>
             <a:fld id="{1A7E88B7-70CE-4035-AE73-13FA6FB985D4}" type="slidenum">
               <a:rPr lang="pt-BR" smtClean="0"/>
-              <a:t>‹nº›</a:t>
+              <a:t>‹#›</a:t>
             </a:fld>
             <a:endParaRPr lang="pt-BR"/>
           </a:p>
@@ -3936,7 +3936,7 @@
           <a:p>
             <a:fld id="{63289F7E-B80B-496E-81B4-D396C37C9454}" type="datetimeFigureOut">
               <a:rPr lang="pt-BR" smtClean="0"/>
-              <a:t>06/10/2023</a:t>
+              <a:t>07/05/2025</a:t>
             </a:fld>
             <a:endParaRPr lang="pt-BR"/>
           </a:p>
@@ -3990,7 +3990,7 @@
           <a:p>
             <a:fld id="{1A7E88B7-70CE-4035-AE73-13FA6FB985D4}" type="slidenum">
               <a:rPr lang="pt-BR" smtClean="0"/>
-              <a:t>‹nº›</a:t>
+              <a:t>‹#›</a:t>
             </a:fld>
             <a:endParaRPr lang="pt-BR"/>
           </a:p>
@@ -4077,7 +4077,7 @@
           <a:p>
             <a:fld id="{63289F7E-B80B-496E-81B4-D396C37C9454}" type="datetimeFigureOut">
               <a:rPr lang="pt-BR" smtClean="0"/>
-              <a:t>06/10/2023</a:t>
+              <a:t>07/05/2025</a:t>
             </a:fld>
             <a:endParaRPr lang="pt-BR"/>
           </a:p>
@@ -4131,7 +4131,7 @@
           <a:p>
             <a:fld id="{1A7E88B7-70CE-4035-AE73-13FA6FB985D4}" type="slidenum">
               <a:rPr lang="pt-BR" smtClean="0"/>
-              <a:t>‹nº›</a:t>
+              <a:t>‹#›</a:t>
             </a:fld>
             <a:endParaRPr lang="pt-BR"/>
           </a:p>
@@ -4190,7 +4190,7 @@
           <a:p>
             <a:fld id="{63289F7E-B80B-496E-81B4-D396C37C9454}" type="datetimeFigureOut">
               <a:rPr lang="pt-BR" smtClean="0"/>
-              <a:t>06/10/2023</a:t>
+              <a:t>07/05/2025</a:t>
             </a:fld>
             <a:endParaRPr lang="pt-BR"/>
           </a:p>
@@ -4244,7 +4244,7 @@
           <a:p>
             <a:fld id="{1A7E88B7-70CE-4035-AE73-13FA6FB985D4}" type="slidenum">
               <a:rPr lang="pt-BR" smtClean="0"/>
-              <a:t>‹nº›</a:t>
+              <a:t>‹#›</a:t>
             </a:fld>
             <a:endParaRPr lang="pt-BR"/>
           </a:p>
@@ -4501,7 +4501,7 @@
           <a:p>
             <a:fld id="{63289F7E-B80B-496E-81B4-D396C37C9454}" type="datetimeFigureOut">
               <a:rPr lang="pt-BR" smtClean="0"/>
-              <a:t>06/10/2023</a:t>
+              <a:t>07/05/2025</a:t>
             </a:fld>
             <a:endParaRPr lang="pt-BR"/>
           </a:p>
@@ -4555,7 +4555,7 @@
           <a:p>
             <a:fld id="{1A7E88B7-70CE-4035-AE73-13FA6FB985D4}" type="slidenum">
               <a:rPr lang="pt-BR" smtClean="0"/>
-              <a:t>‹nº›</a:t>
+              <a:t>‹#›</a:t>
             </a:fld>
             <a:endParaRPr lang="pt-BR"/>
           </a:p>
@@ -4789,7 +4789,7 @@
           <a:p>
             <a:fld id="{63289F7E-B80B-496E-81B4-D396C37C9454}" type="datetimeFigureOut">
               <a:rPr lang="pt-BR" smtClean="0"/>
-              <a:t>06/10/2023</a:t>
+              <a:t>07/05/2025</a:t>
             </a:fld>
             <a:endParaRPr lang="pt-BR"/>
           </a:p>
@@ -4843,7 +4843,7 @@
           <a:p>
             <a:fld id="{1A7E88B7-70CE-4035-AE73-13FA6FB985D4}" type="slidenum">
               <a:rPr lang="pt-BR" smtClean="0"/>
-              <a:t>‹nº›</a:t>
+              <a:t>‹#›</a:t>
             </a:fld>
             <a:endParaRPr lang="pt-BR"/>
           </a:p>
@@ -5030,7 +5030,7 @@
           <a:p>
             <a:fld id="{63289F7E-B80B-496E-81B4-D396C37C9454}" type="datetimeFigureOut">
               <a:rPr lang="pt-BR" smtClean="0"/>
-              <a:t>06/10/2023</a:t>
+              <a:t>07/05/2025</a:t>
             </a:fld>
             <a:endParaRPr lang="pt-BR"/>
           </a:p>
@@ -5120,7 +5120,7 @@
           <a:p>
             <a:fld id="{1A7E88B7-70CE-4035-AE73-13FA6FB985D4}" type="slidenum">
               <a:rPr lang="pt-BR" smtClean="0"/>
-              <a:t>‹nº›</a:t>
+              <a:t>‹#›</a:t>
             </a:fld>
             <a:endParaRPr lang="pt-BR"/>
           </a:p>
@@ -5816,11 +5816,20 @@
             <a:r>
               <a:rPr lang="pt-BR" b="1" i="1" dirty="0">
                 <a:solidFill>
+                  <a:srgbClr val="FF0000"/>
+                </a:solidFill>
+                <a:effectLst/>
+              </a:rPr>
+              <a:t>performance geral</a:t>
+            </a:r>
+            <a:r>
+              <a:rPr lang="pt-BR" b="1" i="1" dirty="0">
+                <a:solidFill>
                   <a:srgbClr val="00B050"/>
                 </a:solidFill>
                 <a:effectLst/>
               </a:rPr>
-              <a:t>performance geral do modelo</a:t>
+              <a:t> do modelo</a:t>
             </a:r>
             <a:r>
               <a:rPr lang="pt-BR" b="0" i="0" dirty="0">
@@ -6189,7 +6198,15 @@
                   <a:srgbClr val="00B050"/>
                 </a:solidFill>
               </a:rPr>
-              <a:t>enganosa com problemas desbalanceados</a:t>
+              <a:t>enganosa com problemas </a:t>
+            </a:r>
+            <a:r>
+              <a:rPr lang="pt-BR" b="1" i="1" dirty="0">
+                <a:solidFill>
+                  <a:srgbClr val="FF0000"/>
+                </a:solidFill>
+              </a:rPr>
+              <a:t>desbalanceados</a:t>
             </a:r>
             <a:r>
               <a:rPr lang="pt-BR" dirty="0">
@@ -6513,8 +6530,8 @@
           </a:p>
         </p:txBody>
       </p:sp>
-      <mc:AlternateContent xmlns:mc="http://schemas.openxmlformats.org/markup-compatibility/2006">
-        <mc:Choice xmlns:a14="http://schemas.microsoft.com/office/drawing/2010/main" Requires="a14">
+      <mc:AlternateContent xmlns:mc="http://schemas.openxmlformats.org/markup-compatibility/2006" xmlns:a14="http://schemas.microsoft.com/office/drawing/2010/main">
+        <mc:Choice Requires="a14">
           <p:sp>
             <p:nvSpPr>
               <p:cNvPr id="3" name="Espaço Reservado para Conteúdo 2">
@@ -7018,7 +7035,7 @@
             </p:txBody>
           </p:sp>
         </mc:Choice>
-        <mc:Fallback>
+        <mc:Fallback xmlns="">
           <p:sp>
             <p:nvSpPr>
               <p:cNvPr id="3" name="Espaço Reservado para Conteúdo 2">
@@ -7180,7 +7197,23 @@
                   <a:srgbClr val="00B050"/>
                 </a:solidFill>
               </a:rPr>
-              <a:t>quando os custos de falsos positivos são altos</a:t>
+              <a:t>quando os custos de </a:t>
+            </a:r>
+            <a:r>
+              <a:rPr lang="pt-BR" b="1" i="1" dirty="0">
+                <a:solidFill>
+                  <a:srgbClr val="FF0000"/>
+                </a:solidFill>
+              </a:rPr>
+              <a:t>falsos positivos</a:t>
+            </a:r>
+            <a:r>
+              <a:rPr lang="pt-BR" b="1" i="1" dirty="0">
+                <a:solidFill>
+                  <a:srgbClr val="00B050"/>
+                </a:solidFill>
+              </a:rPr>
+              <a:t> são altos</a:t>
             </a:r>
             <a:r>
               <a:rPr lang="pt-BR" dirty="0"/>
@@ -7991,7 +8024,23 @@
                   <a:srgbClr val="00B050"/>
                 </a:solidFill>
               </a:rPr>
-              <a:t>quando os custos de falsos negativos são altos</a:t>
+              <a:t>quando os custos de </a:t>
+            </a:r>
+            <a:r>
+              <a:rPr lang="pt-BR" b="1" i="1" dirty="0">
+                <a:solidFill>
+                  <a:srgbClr val="FF0000"/>
+                </a:solidFill>
+              </a:rPr>
+              <a:t>falsos negativos</a:t>
+            </a:r>
+            <a:r>
+              <a:rPr lang="pt-BR" b="1" i="1" dirty="0">
+                <a:solidFill>
+                  <a:srgbClr val="00B050"/>
+                </a:solidFill>
+              </a:rPr>
+              <a:t> são altos</a:t>
             </a:r>
             <a:r>
               <a:rPr lang="pt-BR" dirty="0"/>
@@ -8632,8 +8681,8 @@
           <a:chExt cx="0" cy="0"/>
         </a:xfrm>
       </p:grpSpPr>
-      <mc:AlternateContent xmlns:mc="http://schemas.openxmlformats.org/markup-compatibility/2006">
-        <mc:Choice xmlns:a14="http://schemas.microsoft.com/office/drawing/2010/main" Requires="a14">
+      <mc:AlternateContent xmlns:mc="http://schemas.openxmlformats.org/markup-compatibility/2006" xmlns:a14="http://schemas.microsoft.com/office/drawing/2010/main">
+        <mc:Choice Requires="a14">
           <p:sp>
             <p:nvSpPr>
               <p:cNvPr id="3" name="Espaço Reservado para Conteúdo 2">
@@ -8687,7 +8736,7 @@
             </p:txBody>
           </p:sp>
         </mc:Choice>
-        <mc:Fallback>
+        <mc:Fallback xmlns="">
           <p:sp>
             <p:nvSpPr>
               <p:cNvPr id="3" name="Espaço Reservado para Conteúdo 2">
@@ -20412,7 +20461,7 @@
           <a:p>
             <a:r>
               <a:rPr lang="pt-BR" dirty="0"/>
-              <a:t>Porém, existem outras métricas que devem ser usadas para se medir a qualidade de um classificador.</a:t>
+              <a:t>Porém, existem outras métricas que podem ser usadas para se medir a qualidade de um classificador.</a:t>
             </a:r>
           </a:p>
           <a:p>
@@ -28565,6 +28614,836 @@
         <mc:Choice Requires="a14">
           <p:sp>
             <p:nvSpPr>
+              <p:cNvPr id="5" name="CaixaDeTexto 4">
+                <a:extLst>
+                  <a:ext uri="{FF2B5EF4-FFF2-40B4-BE49-F238E27FC236}">
+                    <a16:creationId xmlns:a16="http://schemas.microsoft.com/office/drawing/2014/main" id="{9FE2C07F-02D2-0345-E394-150F01C017C4}"/>
+                  </a:ext>
+                </a:extLst>
+              </p:cNvPr>
+              <p:cNvSpPr txBox="1"/>
+              <p:nvPr/>
+            </p:nvSpPr>
+            <p:spPr>
+              <a:xfrm>
+                <a:off x="4114741" y="2367844"/>
+                <a:ext cx="4854223" cy="2122312"/>
+              </a:xfrm>
+              <a:prstGeom prst="rect">
+                <a:avLst/>
+              </a:prstGeom>
+              <a:noFill/>
+            </p:spPr>
+            <p:txBody>
+              <a:bodyPr wrap="square">
+                <a:spAutoFit/>
+              </a:bodyPr>
+              <a:lstStyle/>
+              <a:p>
+                <a:pPr/>
+                <a14:m>
+                  <m:oMathPara xmlns:m="http://schemas.openxmlformats.org/officeDocument/2006/math">
+                    <m:oMathParaPr>
+                      <m:jc m:val="centerGroup"/>
+                    </m:oMathParaPr>
+                    <m:oMath xmlns:m="http://schemas.openxmlformats.org/officeDocument/2006/math">
+                      <m:d>
+                        <m:dPr>
+                          <m:begChr m:val="["/>
+                          <m:endChr m:val="]"/>
+                          <m:ctrlPr>
+                            <a:rPr lang="pt-BR" sz="3200" b="0" i="1" smtClean="0">
+                              <a:latin typeface="Cambria Math" panose="02040503050406030204" pitchFamily="18" charset="0"/>
+                            </a:rPr>
+                          </m:ctrlPr>
+                        </m:dPr>
+                        <m:e>
+                          <m:m>
+                            <m:mPr>
+                              <m:mcs>
+                                <m:mc>
+                                  <m:mcPr>
+                                    <m:count m:val="3"/>
+                                    <m:mcJc m:val="center"/>
+                                  </m:mcPr>
+                                </m:mc>
+                              </m:mcs>
+                              <m:ctrlPr>
+                                <a:rPr lang="pt-BR" sz="3200" b="0" i="1" smtClean="0">
+                                  <a:latin typeface="Cambria Math" panose="02040503050406030204" pitchFamily="18" charset="0"/>
+                                </a:rPr>
+                              </m:ctrlPr>
+                            </m:mPr>
+                            <m:mr>
+                              <m:e>
+                                <m:m>
+                                  <m:mPr>
+                                    <m:mcs>
+                                      <m:mc>
+                                        <m:mcPr>
+                                          <m:count m:val="1"/>
+                                          <m:mcJc m:val="center"/>
+                                        </m:mcPr>
+                                      </m:mc>
+                                    </m:mcs>
+                                    <m:ctrlPr>
+                                      <a:rPr lang="pt-BR" sz="3200" b="0" i="1" smtClean="0">
+                                        <a:latin typeface="Cambria Math" panose="02040503050406030204" pitchFamily="18" charset="0"/>
+                                      </a:rPr>
+                                    </m:ctrlPr>
+                                  </m:mPr>
+                                  <m:mr>
+                                    <m:e>
+                                      <m:m>
+                                        <m:mPr>
+                                          <m:mcs>
+                                            <m:mc>
+                                              <m:mcPr>
+                                                <m:count m:val="2"/>
+                                                <m:mcJc m:val="center"/>
+                                              </m:mcPr>
+                                            </m:mc>
+                                          </m:mcs>
+                                          <m:ctrlPr>
+                                            <a:rPr lang="pt-BR" sz="3200" b="0" i="1" smtClean="0">
+                                              <a:latin typeface="Cambria Math" panose="02040503050406030204" pitchFamily="18" charset="0"/>
+                                            </a:rPr>
+                                          </m:ctrlPr>
+                                        </m:mPr>
+                                        <m:mr>
+                                          <m:e>
+                                            <m:sSub>
+                                              <m:sSubPr>
+                                                <m:ctrlPr>
+                                                  <a:rPr lang="pt-BR" sz="3200" i="1">
+                                                    <a:latin typeface="Cambria Math" panose="02040503050406030204" pitchFamily="18" charset="0"/>
+                                                  </a:rPr>
+                                                </m:ctrlPr>
+                                              </m:sSubPr>
+                                              <m:e>
+                                                <m:r>
+                                                  <a:rPr lang="pt-BR" sz="3200" i="1">
+                                                    <a:latin typeface="Cambria Math" panose="02040503050406030204" pitchFamily="18" charset="0"/>
+                                                  </a:rPr>
+                                                  <m:t>𝐶</m:t>
+                                                </m:r>
+                                              </m:e>
+                                              <m:sub>
+                                                <m:r>
+                                                  <a:rPr lang="pt-BR" sz="3200" i="1">
+                                                    <a:latin typeface="Cambria Math" panose="02040503050406030204" pitchFamily="18" charset="0"/>
+                                                  </a:rPr>
+                                                  <m:t>11</m:t>
+                                                </m:r>
+                                              </m:sub>
+                                            </m:sSub>
+                                          </m:e>
+                                          <m:e>
+                                            <m:sSub>
+                                              <m:sSubPr>
+                                                <m:ctrlPr>
+                                                  <a:rPr lang="pt-BR" sz="3200" i="1">
+                                                    <a:latin typeface="Cambria Math" panose="02040503050406030204" pitchFamily="18" charset="0"/>
+                                                  </a:rPr>
+                                                </m:ctrlPr>
+                                              </m:sSubPr>
+                                              <m:e>
+                                                <m:r>
+                                                  <a:rPr lang="pt-BR" sz="3200" i="1">
+                                                    <a:latin typeface="Cambria Math" panose="02040503050406030204" pitchFamily="18" charset="0"/>
+                                                  </a:rPr>
+                                                  <m:t>𝐶</m:t>
+                                                </m:r>
+                                              </m:e>
+                                              <m:sub>
+                                                <m:r>
+                                                  <a:rPr lang="pt-BR" sz="3200" i="1">
+                                                    <a:latin typeface="Cambria Math" panose="02040503050406030204" pitchFamily="18" charset="0"/>
+                                                  </a:rPr>
+                                                  <m:t>1</m:t>
+                                                </m:r>
+                                                <m:r>
+                                                  <a:rPr lang="pt-BR" sz="3200" b="0" i="1" smtClean="0">
+                                                    <a:latin typeface="Cambria Math" panose="02040503050406030204" pitchFamily="18" charset="0"/>
+                                                  </a:rPr>
+                                                  <m:t>2</m:t>
+                                                </m:r>
+                                              </m:sub>
+                                            </m:sSub>
+                                          </m:e>
+                                        </m:mr>
+                                      </m:m>
+                                    </m:e>
+                                  </m:mr>
+                                  <m:mr>
+                                    <m:e>
+                                      <m:m>
+                                        <m:mPr>
+                                          <m:mcs>
+                                            <m:mc>
+                                              <m:mcPr>
+                                                <m:count m:val="2"/>
+                                                <m:mcJc m:val="center"/>
+                                              </m:mcPr>
+                                            </m:mc>
+                                          </m:mcs>
+                                          <m:ctrlPr>
+                                            <a:rPr lang="pt-BR" sz="3200" b="0" i="1" smtClean="0">
+                                              <a:latin typeface="Cambria Math" panose="02040503050406030204" pitchFamily="18" charset="0"/>
+                                            </a:rPr>
+                                          </m:ctrlPr>
+                                        </m:mPr>
+                                        <m:mr>
+                                          <m:e>
+                                            <m:sSub>
+                                              <m:sSubPr>
+                                                <m:ctrlPr>
+                                                  <a:rPr lang="pt-BR" sz="3200" i="1">
+                                                    <a:latin typeface="Cambria Math" panose="02040503050406030204" pitchFamily="18" charset="0"/>
+                                                  </a:rPr>
+                                                </m:ctrlPr>
+                                              </m:sSubPr>
+                                              <m:e>
+                                                <m:r>
+                                                  <a:rPr lang="pt-BR" sz="3200" i="1">
+                                                    <a:latin typeface="Cambria Math" panose="02040503050406030204" pitchFamily="18" charset="0"/>
+                                                  </a:rPr>
+                                                  <m:t>𝐶</m:t>
+                                                </m:r>
+                                              </m:e>
+                                              <m:sub>
+                                                <m:r>
+                                                  <a:rPr lang="pt-BR" sz="3200" b="0" i="1" smtClean="0">
+                                                    <a:latin typeface="Cambria Math" panose="02040503050406030204" pitchFamily="18" charset="0"/>
+                                                  </a:rPr>
+                                                  <m:t>2</m:t>
+                                                </m:r>
+                                                <m:r>
+                                                  <a:rPr lang="pt-BR" sz="3200" i="1">
+                                                    <a:latin typeface="Cambria Math" panose="02040503050406030204" pitchFamily="18" charset="0"/>
+                                                  </a:rPr>
+                                                  <m:t>1</m:t>
+                                                </m:r>
+                                              </m:sub>
+                                            </m:sSub>
+                                          </m:e>
+                                          <m:e>
+                                            <m:sSub>
+                                              <m:sSubPr>
+                                                <m:ctrlPr>
+                                                  <a:rPr lang="pt-BR" sz="3200" i="1">
+                                                    <a:latin typeface="Cambria Math" panose="02040503050406030204" pitchFamily="18" charset="0"/>
+                                                  </a:rPr>
+                                                </m:ctrlPr>
+                                              </m:sSubPr>
+                                              <m:e>
+                                                <m:r>
+                                                  <a:rPr lang="pt-BR" sz="3200" i="1">
+                                                    <a:latin typeface="Cambria Math" panose="02040503050406030204" pitchFamily="18" charset="0"/>
+                                                  </a:rPr>
+                                                  <m:t>𝐶</m:t>
+                                                </m:r>
+                                              </m:e>
+                                              <m:sub>
+                                                <m:r>
+                                                  <a:rPr lang="pt-BR" sz="3200" b="0" i="1" smtClean="0">
+                                                    <a:latin typeface="Cambria Math" panose="02040503050406030204" pitchFamily="18" charset="0"/>
+                                                  </a:rPr>
+                                                  <m:t>22</m:t>
+                                                </m:r>
+                                              </m:sub>
+                                            </m:sSub>
+                                          </m:e>
+                                        </m:mr>
+                                      </m:m>
+                                    </m:e>
+                                  </m:mr>
+                                </m:m>
+                              </m:e>
+                              <m:e>
+                                <m:r>
+                                  <a:rPr lang="pt-BR" sz="3200" b="0" i="1" smtClean="0">
+                                    <a:latin typeface="Cambria Math" panose="02040503050406030204" pitchFamily="18" charset="0"/>
+                                  </a:rPr>
+                                  <m:t>⋯</m:t>
+                                </m:r>
+                              </m:e>
+                              <m:e>
+                                <m:m>
+                                  <m:mPr>
+                                    <m:mcs>
+                                      <m:mc>
+                                        <m:mcPr>
+                                          <m:count m:val="1"/>
+                                          <m:mcJc m:val="center"/>
+                                        </m:mcPr>
+                                      </m:mc>
+                                    </m:mcs>
+                                    <m:ctrlPr>
+                                      <a:rPr lang="pt-BR" sz="3200" b="0" i="1" smtClean="0">
+                                        <a:latin typeface="Cambria Math" panose="02040503050406030204" pitchFamily="18" charset="0"/>
+                                      </a:rPr>
+                                    </m:ctrlPr>
+                                  </m:mPr>
+                                  <m:mr>
+                                    <m:e>
+                                      <m:sSub>
+                                        <m:sSubPr>
+                                          <m:ctrlPr>
+                                            <a:rPr lang="pt-BR" sz="3200" i="1">
+                                              <a:latin typeface="Cambria Math" panose="02040503050406030204" pitchFamily="18" charset="0"/>
+                                            </a:rPr>
+                                          </m:ctrlPr>
+                                        </m:sSubPr>
+                                        <m:e>
+                                          <m:r>
+                                            <a:rPr lang="pt-BR" sz="3200" i="1">
+                                              <a:latin typeface="Cambria Math" panose="02040503050406030204" pitchFamily="18" charset="0"/>
+                                            </a:rPr>
+                                            <m:t>𝐶</m:t>
+                                          </m:r>
+                                        </m:e>
+                                        <m:sub>
+                                          <m:r>
+                                            <a:rPr lang="pt-BR" sz="3200" i="1">
+                                              <a:latin typeface="Cambria Math" panose="02040503050406030204" pitchFamily="18" charset="0"/>
+                                            </a:rPr>
+                                            <m:t>1</m:t>
+                                          </m:r>
+                                          <m:r>
+                                            <a:rPr lang="pt-BR" sz="3200" i="1">
+                                              <a:latin typeface="Cambria Math" panose="02040503050406030204" pitchFamily="18" charset="0"/>
+                                            </a:rPr>
+                                            <m:t>𝑄</m:t>
+                                          </m:r>
+                                        </m:sub>
+                                      </m:sSub>
+                                    </m:e>
+                                  </m:mr>
+                                  <m:mr>
+                                    <m:e>
+                                      <m:sSub>
+                                        <m:sSubPr>
+                                          <m:ctrlPr>
+                                            <a:rPr lang="pt-BR" sz="3200" i="1">
+                                              <a:latin typeface="Cambria Math" panose="02040503050406030204" pitchFamily="18" charset="0"/>
+                                            </a:rPr>
+                                          </m:ctrlPr>
+                                        </m:sSubPr>
+                                        <m:e>
+                                          <m:r>
+                                            <a:rPr lang="pt-BR" sz="3200" i="1">
+                                              <a:latin typeface="Cambria Math" panose="02040503050406030204" pitchFamily="18" charset="0"/>
+                                            </a:rPr>
+                                            <m:t>𝐶</m:t>
+                                          </m:r>
+                                        </m:e>
+                                        <m:sub>
+                                          <m:r>
+                                            <a:rPr lang="pt-BR" sz="3200" b="0" i="1" smtClean="0">
+                                              <a:latin typeface="Cambria Math" panose="02040503050406030204" pitchFamily="18" charset="0"/>
+                                            </a:rPr>
+                                            <m:t>2</m:t>
+                                          </m:r>
+                                          <m:r>
+                                            <a:rPr lang="pt-BR" sz="3200" i="1">
+                                              <a:latin typeface="Cambria Math" panose="02040503050406030204" pitchFamily="18" charset="0"/>
+                                            </a:rPr>
+                                            <m:t>𝑄</m:t>
+                                          </m:r>
+                                        </m:sub>
+                                      </m:sSub>
+                                    </m:e>
+                                  </m:mr>
+                                </m:m>
+                              </m:e>
+                            </m:mr>
+                            <m:mr>
+                              <m:e>
+                                <m:r>
+                                  <a:rPr lang="pt-BR" sz="3200" b="0" i="1" smtClean="0">
+                                    <a:latin typeface="Cambria Math" panose="02040503050406030204" pitchFamily="18" charset="0"/>
+                                  </a:rPr>
+                                  <m:t>⋮</m:t>
+                                </m:r>
+                              </m:e>
+                              <m:e>
+                                <m:r>
+                                  <a:rPr lang="pt-BR" sz="3200" b="0" i="1" smtClean="0">
+                                    <a:latin typeface="Cambria Math" panose="02040503050406030204" pitchFamily="18" charset="0"/>
+                                  </a:rPr>
+                                  <m:t>⋱</m:t>
+                                </m:r>
+                              </m:e>
+                              <m:e>
+                                <m:r>
+                                  <a:rPr lang="pt-BR" sz="3200" b="0" i="1" smtClean="0">
+                                    <a:latin typeface="Cambria Math" panose="02040503050406030204" pitchFamily="18" charset="0"/>
+                                  </a:rPr>
+                                  <m:t>⋮</m:t>
+                                </m:r>
+                              </m:e>
+                            </m:mr>
+                            <m:mr>
+                              <m:e>
+                                <m:m>
+                                  <m:mPr>
+                                    <m:mcs>
+                                      <m:mc>
+                                        <m:mcPr>
+                                          <m:count m:val="2"/>
+                                          <m:mcJc m:val="center"/>
+                                        </m:mcPr>
+                                      </m:mc>
+                                    </m:mcs>
+                                    <m:ctrlPr>
+                                      <a:rPr lang="pt-BR" sz="3200" b="0" i="1" smtClean="0">
+                                        <a:latin typeface="Cambria Math" panose="02040503050406030204" pitchFamily="18" charset="0"/>
+                                      </a:rPr>
+                                    </m:ctrlPr>
+                                  </m:mPr>
+                                  <m:mr>
+                                    <m:e>
+                                      <m:sSub>
+                                        <m:sSubPr>
+                                          <m:ctrlPr>
+                                            <a:rPr lang="pt-BR" sz="3200" i="1">
+                                              <a:latin typeface="Cambria Math" panose="02040503050406030204" pitchFamily="18" charset="0"/>
+                                            </a:rPr>
+                                          </m:ctrlPr>
+                                        </m:sSubPr>
+                                        <m:e>
+                                          <m:r>
+                                            <a:rPr lang="pt-BR" sz="3200" i="1">
+                                              <a:latin typeface="Cambria Math" panose="02040503050406030204" pitchFamily="18" charset="0"/>
+                                            </a:rPr>
+                                            <m:t>𝐶</m:t>
+                                          </m:r>
+                                        </m:e>
+                                        <m:sub>
+                                          <m:r>
+                                            <a:rPr lang="pt-BR" sz="3200" b="0" i="1" smtClean="0">
+                                              <a:latin typeface="Cambria Math" panose="02040503050406030204" pitchFamily="18" charset="0"/>
+                                            </a:rPr>
+                                            <m:t>𝑄</m:t>
+                                          </m:r>
+                                          <m:r>
+                                            <a:rPr lang="pt-BR" sz="3200" i="1">
+                                              <a:latin typeface="Cambria Math" panose="02040503050406030204" pitchFamily="18" charset="0"/>
+                                            </a:rPr>
+                                            <m:t>1</m:t>
+                                          </m:r>
+                                        </m:sub>
+                                      </m:sSub>
+                                    </m:e>
+                                    <m:e>
+                                      <m:sSub>
+                                        <m:sSubPr>
+                                          <m:ctrlPr>
+                                            <a:rPr lang="pt-BR" sz="3200" i="1">
+                                              <a:latin typeface="Cambria Math" panose="02040503050406030204" pitchFamily="18" charset="0"/>
+                                            </a:rPr>
+                                          </m:ctrlPr>
+                                        </m:sSubPr>
+                                        <m:e>
+                                          <m:r>
+                                            <a:rPr lang="pt-BR" sz="3200" i="1">
+                                              <a:latin typeface="Cambria Math" panose="02040503050406030204" pitchFamily="18" charset="0"/>
+                                            </a:rPr>
+                                            <m:t>𝐶</m:t>
+                                          </m:r>
+                                        </m:e>
+                                        <m:sub>
+                                          <m:r>
+                                            <a:rPr lang="pt-BR" sz="3200" b="0" i="1" smtClean="0">
+                                              <a:latin typeface="Cambria Math" panose="02040503050406030204" pitchFamily="18" charset="0"/>
+                                            </a:rPr>
+                                            <m:t>𝑄</m:t>
+                                          </m:r>
+                                          <m:r>
+                                            <a:rPr lang="pt-BR" sz="3200" b="0" i="1" smtClean="0">
+                                              <a:latin typeface="Cambria Math" panose="02040503050406030204" pitchFamily="18" charset="0"/>
+                                            </a:rPr>
+                                            <m:t>2</m:t>
+                                          </m:r>
+                                        </m:sub>
+                                      </m:sSub>
+                                    </m:e>
+                                  </m:mr>
+                                </m:m>
+                              </m:e>
+                              <m:e>
+                                <m:r>
+                                  <a:rPr lang="pt-BR" sz="3200" b="0" i="1" smtClean="0">
+                                    <a:latin typeface="Cambria Math" panose="02040503050406030204" pitchFamily="18" charset="0"/>
+                                  </a:rPr>
+                                  <m:t>⋯</m:t>
+                                </m:r>
+                              </m:e>
+                              <m:e>
+                                <m:sSub>
+                                  <m:sSubPr>
+                                    <m:ctrlPr>
+                                      <a:rPr lang="pt-BR" sz="3200" i="1">
+                                        <a:latin typeface="Cambria Math" panose="02040503050406030204" pitchFamily="18" charset="0"/>
+                                      </a:rPr>
+                                    </m:ctrlPr>
+                                  </m:sSubPr>
+                                  <m:e>
+                                    <m:r>
+                                      <a:rPr lang="pt-BR" sz="3200" i="1">
+                                        <a:latin typeface="Cambria Math" panose="02040503050406030204" pitchFamily="18" charset="0"/>
+                                      </a:rPr>
+                                      <m:t>𝐶</m:t>
+                                    </m:r>
+                                  </m:e>
+                                  <m:sub>
+                                    <m:r>
+                                      <a:rPr lang="pt-BR" sz="3200" b="0" i="1" smtClean="0">
+                                        <a:latin typeface="Cambria Math" panose="02040503050406030204" pitchFamily="18" charset="0"/>
+                                      </a:rPr>
+                                      <m:t>𝑄</m:t>
+                                    </m:r>
+                                    <m:r>
+                                      <a:rPr lang="pt-BR" sz="3200" i="1">
+                                        <a:latin typeface="Cambria Math" panose="02040503050406030204" pitchFamily="18" charset="0"/>
+                                      </a:rPr>
+                                      <m:t>𝑄</m:t>
+                                    </m:r>
+                                  </m:sub>
+                                </m:sSub>
+                              </m:e>
+                            </m:mr>
+                          </m:m>
+                        </m:e>
+                      </m:d>
+                    </m:oMath>
+                  </m:oMathPara>
+                </a14:m>
+                <a:endParaRPr lang="pt-BR" sz="2400" dirty="0"/>
+              </a:p>
+            </p:txBody>
+          </p:sp>
+        </mc:Choice>
+        <mc:Fallback xmlns="">
+          <p:sp>
+            <p:nvSpPr>
+              <p:cNvPr id="5" name="CaixaDeTexto 4">
+                <a:extLst>
+                  <a:ext uri="{FF2B5EF4-FFF2-40B4-BE49-F238E27FC236}">
+                    <a16:creationId xmlns:a16="http://schemas.microsoft.com/office/drawing/2014/main" id="{9FE2C07F-02D2-0345-E394-150F01C017C4}"/>
+                  </a:ext>
+                </a:extLst>
+              </p:cNvPr>
+              <p:cNvSpPr txBox="1">
+                <a:spLocks noRot="1" noChangeAspect="1" noMove="1" noResize="1" noEditPoints="1" noAdjustHandles="1" noChangeArrowheads="1" noChangeShapeType="1" noTextEdit="1"/>
+              </p:cNvSpPr>
+              <p:nvPr/>
+            </p:nvSpPr>
+            <p:spPr>
+              <a:xfrm>
+                <a:off x="4114741" y="2367844"/>
+                <a:ext cx="4854223" cy="2122312"/>
+              </a:xfrm>
+              <a:prstGeom prst="rect">
+                <a:avLst/>
+              </a:prstGeom>
+              <a:blipFill>
+                <a:blip r:embed="rId3"/>
+                <a:stretch>
+                  <a:fillRect/>
+                </a:stretch>
+              </a:blipFill>
+            </p:spPr>
+            <p:txBody>
+              <a:bodyPr/>
+              <a:lstStyle/>
+              <a:p>
+                <a:r>
+                  <a:rPr lang="pt-BR">
+                    <a:noFill/>
+                  </a:rPr>
+                  <a:t> </a:t>
+                </a:r>
+              </a:p>
+            </p:txBody>
+          </p:sp>
+        </mc:Fallback>
+      </mc:AlternateContent>
+      <p:sp>
+        <p:nvSpPr>
+          <p:cNvPr id="4" name="Chave Direita 3">
+            <a:extLst>
+              <a:ext uri="{FF2B5EF4-FFF2-40B4-BE49-F238E27FC236}">
+                <a16:creationId xmlns:a16="http://schemas.microsoft.com/office/drawing/2014/main" id="{314F6830-34E9-8654-9AF0-D69DE9FAE980}"/>
+              </a:ext>
+            </a:extLst>
+          </p:cNvPr>
+          <p:cNvSpPr/>
+          <p:nvPr/>
+        </p:nvSpPr>
+        <p:spPr>
+          <a:xfrm rot="16200000" flipH="1">
+            <a:off x="6371397" y="2963136"/>
+            <a:ext cx="340913" cy="3394954"/>
+          </a:xfrm>
+          <a:prstGeom prst="rightBrace">
+            <a:avLst/>
+          </a:prstGeom>
+        </p:spPr>
+        <p:style>
+          <a:lnRef idx="1">
+            <a:schemeClr val="accent1"/>
+          </a:lnRef>
+          <a:fillRef idx="0">
+            <a:schemeClr val="accent1"/>
+          </a:fillRef>
+          <a:effectRef idx="0">
+            <a:schemeClr val="accent1"/>
+          </a:effectRef>
+          <a:fontRef idx="minor">
+            <a:schemeClr val="tx1"/>
+          </a:fontRef>
+        </p:style>
+        <p:txBody>
+          <a:bodyPr rtlCol="0" anchor="ctr"/>
+          <a:lstStyle/>
+          <a:p>
+            <a:pPr algn="ctr"/>
+            <a:endParaRPr lang="pt-BR"/>
+          </a:p>
+        </p:txBody>
+      </p:sp>
+      <p:sp>
+        <p:nvSpPr>
+          <p:cNvPr id="6" name="CaixaDeTexto 5">
+            <a:extLst>
+              <a:ext uri="{FF2B5EF4-FFF2-40B4-BE49-F238E27FC236}">
+                <a16:creationId xmlns:a16="http://schemas.microsoft.com/office/drawing/2014/main" id="{AA46DBC8-FBDE-250B-240D-193F0A609C0C}"/>
+              </a:ext>
+            </a:extLst>
+          </p:cNvPr>
+          <p:cNvSpPr txBox="1"/>
+          <p:nvPr/>
+        </p:nvSpPr>
+        <p:spPr>
+          <a:xfrm>
+            <a:off x="4844376" y="4846951"/>
+            <a:ext cx="3394955" cy="646331"/>
+          </a:xfrm>
+          <a:prstGeom prst="rect">
+            <a:avLst/>
+          </a:prstGeom>
+          <a:noFill/>
+        </p:spPr>
+        <p:txBody>
+          <a:bodyPr wrap="square" rtlCol="0">
+            <a:spAutoFit/>
+          </a:bodyPr>
+          <a:lstStyle/>
+          <a:p>
+            <a:pPr algn="ctr"/>
+            <a:r>
+              <a:rPr lang="pt-BR" b="1" i="1" dirty="0">
+                <a:solidFill>
+                  <a:srgbClr val="00B050"/>
+                </a:solidFill>
+              </a:rPr>
+              <a:t>Rótulos</a:t>
+            </a:r>
+            <a:r>
+              <a:rPr lang="pt-BR" dirty="0"/>
+              <a:t>: classes a que realmente pertencem os exemplos</a:t>
+            </a:r>
+          </a:p>
+        </p:txBody>
+      </p:sp>
+      <p:sp>
+        <p:nvSpPr>
+          <p:cNvPr id="7" name="Chave Direita 6">
+            <a:extLst>
+              <a:ext uri="{FF2B5EF4-FFF2-40B4-BE49-F238E27FC236}">
+                <a16:creationId xmlns:a16="http://schemas.microsoft.com/office/drawing/2014/main" id="{E94D5995-3604-C1B4-B485-9B393568D39B}"/>
+              </a:ext>
+            </a:extLst>
+          </p:cNvPr>
+          <p:cNvSpPr/>
+          <p:nvPr/>
+        </p:nvSpPr>
+        <p:spPr>
+          <a:xfrm flipH="1">
+            <a:off x="4172678" y="2509734"/>
+            <a:ext cx="340913" cy="1838528"/>
+          </a:xfrm>
+          <a:prstGeom prst="rightBrace">
+            <a:avLst/>
+          </a:prstGeom>
+        </p:spPr>
+        <p:style>
+          <a:lnRef idx="1">
+            <a:schemeClr val="accent1"/>
+          </a:lnRef>
+          <a:fillRef idx="0">
+            <a:schemeClr val="accent1"/>
+          </a:fillRef>
+          <a:effectRef idx="0">
+            <a:schemeClr val="accent1"/>
+          </a:effectRef>
+          <a:fontRef idx="minor">
+            <a:schemeClr val="tx1"/>
+          </a:fontRef>
+        </p:style>
+        <p:txBody>
+          <a:bodyPr rtlCol="0" anchor="ctr"/>
+          <a:lstStyle/>
+          <a:p>
+            <a:pPr algn="ctr"/>
+            <a:endParaRPr lang="pt-BR"/>
+          </a:p>
+        </p:txBody>
+      </p:sp>
+      <p:sp>
+        <p:nvSpPr>
+          <p:cNvPr id="8" name="CaixaDeTexto 7">
+            <a:extLst>
+              <a:ext uri="{FF2B5EF4-FFF2-40B4-BE49-F238E27FC236}">
+                <a16:creationId xmlns:a16="http://schemas.microsoft.com/office/drawing/2014/main" id="{AF3B44CB-FB5A-9774-1C6B-808D8FC9AA1C}"/>
+              </a:ext>
+            </a:extLst>
+          </p:cNvPr>
+          <p:cNvSpPr txBox="1"/>
+          <p:nvPr/>
+        </p:nvSpPr>
+        <p:spPr>
+          <a:xfrm>
+            <a:off x="1381327" y="3105832"/>
+            <a:ext cx="2733414" cy="646331"/>
+          </a:xfrm>
+          <a:prstGeom prst="rect">
+            <a:avLst/>
+          </a:prstGeom>
+          <a:noFill/>
+        </p:spPr>
+        <p:txBody>
+          <a:bodyPr wrap="square" rtlCol="0">
+            <a:spAutoFit/>
+          </a:bodyPr>
+          <a:lstStyle/>
+          <a:p>
+            <a:pPr algn="ctr"/>
+            <a:r>
+              <a:rPr lang="pt-BR" b="1" i="1" dirty="0">
+                <a:solidFill>
+                  <a:srgbClr val="00B050"/>
+                </a:solidFill>
+              </a:rPr>
+              <a:t>Predições</a:t>
+            </a:r>
+            <a:r>
+              <a:rPr lang="pt-BR" dirty="0"/>
+              <a:t>: classes a que os exemplos foram atribuídos</a:t>
+            </a:r>
+          </a:p>
+        </p:txBody>
+      </p:sp>
+      <p:sp>
+        <p:nvSpPr>
+          <p:cNvPr id="3" name="TextBox 2">
+            <a:extLst>
+              <a:ext uri="{FF2B5EF4-FFF2-40B4-BE49-F238E27FC236}">
+                <a16:creationId xmlns:a16="http://schemas.microsoft.com/office/drawing/2014/main" id="{B69DC4B7-28AE-3B52-6F26-3A317D0DAC53}"/>
+              </a:ext>
+            </a:extLst>
+          </p:cNvPr>
+          <p:cNvSpPr txBox="1"/>
+          <p:nvPr/>
+        </p:nvSpPr>
+        <p:spPr>
+          <a:xfrm>
+            <a:off x="0" y="6612468"/>
+            <a:ext cx="5647700" cy="261610"/>
+          </a:xfrm>
+          <a:prstGeom prst="rect">
+            <a:avLst/>
+          </a:prstGeom>
+          <a:noFill/>
+        </p:spPr>
+        <p:txBody>
+          <a:bodyPr wrap="none" rtlCol="0">
+            <a:spAutoFit/>
+          </a:bodyPr>
+          <a:lstStyle/>
+          <a:p>
+            <a:r>
+              <a:rPr lang="pt-BR" sz="1100" dirty="0"/>
+              <a:t>*em geral se apresenta a matriz desta forma, mas ela pode ser encontrada transposta também.</a:t>
+            </a:r>
+            <a:endParaRPr lang="en-US" sz="1100" dirty="0"/>
+          </a:p>
+        </p:txBody>
+      </p:sp>
+    </p:spTree>
+    <p:extLst>
+      <p:ext uri="{BB962C8B-B14F-4D97-AF65-F5344CB8AC3E}">
+        <p14:creationId xmlns:p14="http://schemas.microsoft.com/office/powerpoint/2010/main" val="4252130408"/>
+      </p:ext>
+    </p:extLst>
+  </p:cSld>
+  <p:clrMapOvr>
+    <a:masterClrMapping/>
+  </p:clrMapOvr>
+</p:sld>
+</file>
+
+<file path=ppt/slides/slide5.xml><?xml version="1.0" encoding="utf-8"?>
+<p:sld xmlns:a="http://schemas.openxmlformats.org/drawingml/2006/main" xmlns:r="http://schemas.openxmlformats.org/officeDocument/2006/relationships" xmlns:p="http://schemas.openxmlformats.org/presentationml/2006/main">
+  <p:cSld>
+    <p:spTree>
+      <p:nvGrpSpPr>
+        <p:cNvPr id="1" name=""/>
+        <p:cNvGrpSpPr/>
+        <p:nvPr/>
+      </p:nvGrpSpPr>
+      <p:grpSpPr>
+        <a:xfrm>
+          <a:off x="0" y="0"/>
+          <a:ext cx="0" cy="0"/>
+          <a:chOff x="0" y="0"/>
+          <a:chExt cx="0" cy="0"/>
+        </a:xfrm>
+      </p:grpSpPr>
+      <p:sp>
+        <p:nvSpPr>
+          <p:cNvPr id="2" name="Título 1">
+            <a:extLst>
+              <a:ext uri="{FF2B5EF4-FFF2-40B4-BE49-F238E27FC236}">
+                <a16:creationId xmlns:a16="http://schemas.microsoft.com/office/drawing/2014/main" id="{C738E7C4-65BB-5A05-5DF4-FF60F520CB58}"/>
+              </a:ext>
+            </a:extLst>
+          </p:cNvPr>
+          <p:cNvSpPr>
+            <a:spLocks noGrp="1"/>
+          </p:cNvSpPr>
+          <p:nvPr>
+            <p:ph type="title"/>
+          </p:nvPr>
+        </p:nvSpPr>
+        <p:spPr/>
+        <p:txBody>
+          <a:bodyPr/>
+          <a:lstStyle/>
+          <a:p>
+            <a:r>
+              <a:rPr lang="pt-BR" dirty="0"/>
+              <a:t>Matriz de confusão</a:t>
+            </a:r>
+          </a:p>
+        </p:txBody>
+      </p:sp>
+      <mc:AlternateContent xmlns:mc="http://schemas.openxmlformats.org/markup-compatibility/2006" xmlns:a14="http://schemas.microsoft.com/office/drawing/2010/main">
+        <mc:Choice Requires="a14">
+          <p:sp>
+            <p:nvSpPr>
               <p:cNvPr id="3" name="Espaço Reservado para Conteúdo 2">
                 <a:extLst>
                   <a:ext uri="{FF2B5EF4-FFF2-40B4-BE49-F238E27FC236}">
@@ -29431,6 +30310,110 @@
           </p:sp>
         </mc:Fallback>
       </mc:AlternateContent>
+      <p:sp>
+        <p:nvSpPr>
+          <p:cNvPr id="4" name="Oval 3">
+            <a:extLst>
+              <a:ext uri="{FF2B5EF4-FFF2-40B4-BE49-F238E27FC236}">
+                <a16:creationId xmlns:a16="http://schemas.microsoft.com/office/drawing/2014/main" id="{E3C2398C-FA6E-B604-0A4E-B8DC5CF24EF7}"/>
+              </a:ext>
+            </a:extLst>
+          </p:cNvPr>
+          <p:cNvSpPr/>
+          <p:nvPr/>
+        </p:nvSpPr>
+        <p:spPr>
+          <a:xfrm>
+            <a:off x="1051034" y="2703827"/>
+            <a:ext cx="4096698" cy="526285"/>
+          </a:xfrm>
+          <a:prstGeom prst="ellipse">
+            <a:avLst/>
+          </a:prstGeom>
+          <a:noFill/>
+          <a:ln>
+            <a:solidFill>
+              <a:srgbClr val="FF0000"/>
+            </a:solidFill>
+          </a:ln>
+        </p:spPr>
+        <p:style>
+          <a:lnRef idx="2">
+            <a:schemeClr val="accent1">
+              <a:shade val="50000"/>
+            </a:schemeClr>
+          </a:lnRef>
+          <a:fillRef idx="1">
+            <a:schemeClr val="accent1"/>
+          </a:fillRef>
+          <a:effectRef idx="0">
+            <a:schemeClr val="accent1"/>
+          </a:effectRef>
+          <a:fontRef idx="minor">
+            <a:schemeClr val="lt1"/>
+          </a:fontRef>
+        </p:style>
+        <p:txBody>
+          <a:bodyPr rtlCol="0" anchor="ctr"/>
+          <a:lstStyle/>
+          <a:p>
+            <a:pPr algn="ctr"/>
+            <a:endParaRPr lang="pt-BR"/>
+          </a:p>
+        </p:txBody>
+      </p:sp>
+      <p:sp>
+        <p:nvSpPr>
+          <p:cNvPr id="6" name="Oval 5">
+            <a:extLst>
+              <a:ext uri="{FF2B5EF4-FFF2-40B4-BE49-F238E27FC236}">
+                <a16:creationId xmlns:a16="http://schemas.microsoft.com/office/drawing/2014/main" id="{4BBF1D53-FE8C-A737-118B-224A249F0F55}"/>
+              </a:ext>
+            </a:extLst>
+          </p:cNvPr>
+          <p:cNvSpPr/>
+          <p:nvPr/>
+        </p:nvSpPr>
+        <p:spPr>
+          <a:xfrm rot="5400000">
+            <a:off x="559069" y="3357278"/>
+            <a:ext cx="2251700" cy="792259"/>
+          </a:xfrm>
+          <a:prstGeom prst="ellipse">
+            <a:avLst/>
+          </a:prstGeom>
+          <a:noFill/>
+          <a:ln>
+            <a:solidFill>
+              <a:srgbClr val="FF0000"/>
+            </a:solidFill>
+          </a:ln>
+        </p:spPr>
+        <p:style>
+          <a:lnRef idx="2">
+            <a:schemeClr val="accent1">
+              <a:shade val="50000"/>
+            </a:schemeClr>
+          </a:lnRef>
+          <a:fillRef idx="1">
+            <a:schemeClr val="accent1"/>
+          </a:fillRef>
+          <a:effectRef idx="0">
+            <a:schemeClr val="accent1"/>
+          </a:effectRef>
+          <a:fontRef idx="minor">
+            <a:schemeClr val="lt1"/>
+          </a:fontRef>
+        </p:style>
+        <p:txBody>
+          <a:bodyPr rtlCol="0" anchor="ctr"/>
+          <a:lstStyle/>
+          <a:p>
+            <a:pPr algn="ctr"/>
+            <a:endParaRPr lang="pt-BR"/>
+          </a:p>
+        </p:txBody>
+      </p:sp>
     </p:spTree>
     <p:extLst>
       <p:ext uri="{BB962C8B-B14F-4D97-AF65-F5344CB8AC3E}">
@@ -29444,7 +30427,7 @@
 </p:sld>
 </file>
 
-<file path=ppt/slides/slide5.xml><?xml version="1.0" encoding="utf-8"?>
+<file path=ppt/slides/slide6.xml><?xml version="1.0" encoding="utf-8"?>
 <p:sld xmlns:a="http://schemas.openxmlformats.org/drawingml/2006/main" xmlns:r="http://schemas.openxmlformats.org/officeDocument/2006/relationships" xmlns:p="http://schemas.openxmlformats.org/presentationml/2006/main">
   <p:cSld>
     <p:spTree>
@@ -30584,800 +31567,6 @@
 </p:sld>
 </file>
 
-<file path=ppt/slides/slide6.xml><?xml version="1.0" encoding="utf-8"?>
-<p:sld xmlns:a="http://schemas.openxmlformats.org/drawingml/2006/main" xmlns:r="http://schemas.openxmlformats.org/officeDocument/2006/relationships" xmlns:p="http://schemas.openxmlformats.org/presentationml/2006/main">
-  <p:cSld>
-    <p:spTree>
-      <p:nvGrpSpPr>
-        <p:cNvPr id="1" name=""/>
-        <p:cNvGrpSpPr/>
-        <p:nvPr/>
-      </p:nvGrpSpPr>
-      <p:grpSpPr>
-        <a:xfrm>
-          <a:off x="0" y="0"/>
-          <a:ext cx="0" cy="0"/>
-          <a:chOff x="0" y="0"/>
-          <a:chExt cx="0" cy="0"/>
-        </a:xfrm>
-      </p:grpSpPr>
-      <p:sp>
-        <p:nvSpPr>
-          <p:cNvPr id="2" name="Título 1">
-            <a:extLst>
-              <a:ext uri="{FF2B5EF4-FFF2-40B4-BE49-F238E27FC236}">
-                <a16:creationId xmlns:a16="http://schemas.microsoft.com/office/drawing/2014/main" id="{C738E7C4-65BB-5A05-5DF4-FF60F520CB58}"/>
-              </a:ext>
-            </a:extLst>
-          </p:cNvPr>
-          <p:cNvSpPr>
-            <a:spLocks noGrp="1"/>
-          </p:cNvSpPr>
-          <p:nvPr>
-            <p:ph type="title"/>
-          </p:nvPr>
-        </p:nvSpPr>
-        <p:spPr/>
-        <p:txBody>
-          <a:bodyPr/>
-          <a:lstStyle/>
-          <a:p>
-            <a:r>
-              <a:rPr lang="pt-BR" dirty="0"/>
-              <a:t>Matriz de confusão</a:t>
-            </a:r>
-          </a:p>
-        </p:txBody>
-      </p:sp>
-      <mc:AlternateContent xmlns:mc="http://schemas.openxmlformats.org/markup-compatibility/2006" xmlns:a14="http://schemas.microsoft.com/office/drawing/2010/main">
-        <mc:Choice Requires="a14">
-          <p:sp>
-            <p:nvSpPr>
-              <p:cNvPr id="5" name="CaixaDeTexto 4">
-                <a:extLst>
-                  <a:ext uri="{FF2B5EF4-FFF2-40B4-BE49-F238E27FC236}">
-                    <a16:creationId xmlns:a16="http://schemas.microsoft.com/office/drawing/2014/main" id="{9FE2C07F-02D2-0345-E394-150F01C017C4}"/>
-                  </a:ext>
-                </a:extLst>
-              </p:cNvPr>
-              <p:cNvSpPr txBox="1"/>
-              <p:nvPr/>
-            </p:nvSpPr>
-            <p:spPr>
-              <a:xfrm>
-                <a:off x="4114741" y="2367844"/>
-                <a:ext cx="4854223" cy="2122312"/>
-              </a:xfrm>
-              <a:prstGeom prst="rect">
-                <a:avLst/>
-              </a:prstGeom>
-              <a:noFill/>
-            </p:spPr>
-            <p:txBody>
-              <a:bodyPr wrap="square">
-                <a:spAutoFit/>
-              </a:bodyPr>
-              <a:lstStyle/>
-              <a:p>
-                <a:pPr/>
-                <a14:m>
-                  <m:oMathPara xmlns:m="http://schemas.openxmlformats.org/officeDocument/2006/math">
-                    <m:oMathParaPr>
-                      <m:jc m:val="centerGroup"/>
-                    </m:oMathParaPr>
-                    <m:oMath xmlns:m="http://schemas.openxmlformats.org/officeDocument/2006/math">
-                      <m:d>
-                        <m:dPr>
-                          <m:begChr m:val="["/>
-                          <m:endChr m:val="]"/>
-                          <m:ctrlPr>
-                            <a:rPr lang="pt-BR" sz="3200" b="0" i="1" smtClean="0">
-                              <a:latin typeface="Cambria Math" panose="02040503050406030204" pitchFamily="18" charset="0"/>
-                            </a:rPr>
-                          </m:ctrlPr>
-                        </m:dPr>
-                        <m:e>
-                          <m:m>
-                            <m:mPr>
-                              <m:mcs>
-                                <m:mc>
-                                  <m:mcPr>
-                                    <m:count m:val="3"/>
-                                    <m:mcJc m:val="center"/>
-                                  </m:mcPr>
-                                </m:mc>
-                              </m:mcs>
-                              <m:ctrlPr>
-                                <a:rPr lang="pt-BR" sz="3200" b="0" i="1" smtClean="0">
-                                  <a:latin typeface="Cambria Math" panose="02040503050406030204" pitchFamily="18" charset="0"/>
-                                </a:rPr>
-                              </m:ctrlPr>
-                            </m:mPr>
-                            <m:mr>
-                              <m:e>
-                                <m:m>
-                                  <m:mPr>
-                                    <m:mcs>
-                                      <m:mc>
-                                        <m:mcPr>
-                                          <m:count m:val="1"/>
-                                          <m:mcJc m:val="center"/>
-                                        </m:mcPr>
-                                      </m:mc>
-                                    </m:mcs>
-                                    <m:ctrlPr>
-                                      <a:rPr lang="pt-BR" sz="3200" b="0" i="1" smtClean="0">
-                                        <a:latin typeface="Cambria Math" panose="02040503050406030204" pitchFamily="18" charset="0"/>
-                                      </a:rPr>
-                                    </m:ctrlPr>
-                                  </m:mPr>
-                                  <m:mr>
-                                    <m:e>
-                                      <m:m>
-                                        <m:mPr>
-                                          <m:mcs>
-                                            <m:mc>
-                                              <m:mcPr>
-                                                <m:count m:val="2"/>
-                                                <m:mcJc m:val="center"/>
-                                              </m:mcPr>
-                                            </m:mc>
-                                          </m:mcs>
-                                          <m:ctrlPr>
-                                            <a:rPr lang="pt-BR" sz="3200" b="0" i="1" smtClean="0">
-                                              <a:latin typeface="Cambria Math" panose="02040503050406030204" pitchFamily="18" charset="0"/>
-                                            </a:rPr>
-                                          </m:ctrlPr>
-                                        </m:mPr>
-                                        <m:mr>
-                                          <m:e>
-                                            <m:sSub>
-                                              <m:sSubPr>
-                                                <m:ctrlPr>
-                                                  <a:rPr lang="pt-BR" sz="3200" i="1">
-                                                    <a:latin typeface="Cambria Math" panose="02040503050406030204" pitchFamily="18" charset="0"/>
-                                                  </a:rPr>
-                                                </m:ctrlPr>
-                                              </m:sSubPr>
-                                              <m:e>
-                                                <m:r>
-                                                  <a:rPr lang="pt-BR" sz="3200" i="1">
-                                                    <a:latin typeface="Cambria Math" panose="02040503050406030204" pitchFamily="18" charset="0"/>
-                                                  </a:rPr>
-                                                  <m:t>𝐶</m:t>
-                                                </m:r>
-                                              </m:e>
-                                              <m:sub>
-                                                <m:r>
-                                                  <a:rPr lang="pt-BR" sz="3200" i="1">
-                                                    <a:latin typeface="Cambria Math" panose="02040503050406030204" pitchFamily="18" charset="0"/>
-                                                  </a:rPr>
-                                                  <m:t>11</m:t>
-                                                </m:r>
-                                              </m:sub>
-                                            </m:sSub>
-                                          </m:e>
-                                          <m:e>
-                                            <m:sSub>
-                                              <m:sSubPr>
-                                                <m:ctrlPr>
-                                                  <a:rPr lang="pt-BR" sz="3200" i="1">
-                                                    <a:latin typeface="Cambria Math" panose="02040503050406030204" pitchFamily="18" charset="0"/>
-                                                  </a:rPr>
-                                                </m:ctrlPr>
-                                              </m:sSubPr>
-                                              <m:e>
-                                                <m:r>
-                                                  <a:rPr lang="pt-BR" sz="3200" i="1">
-                                                    <a:latin typeface="Cambria Math" panose="02040503050406030204" pitchFamily="18" charset="0"/>
-                                                  </a:rPr>
-                                                  <m:t>𝐶</m:t>
-                                                </m:r>
-                                              </m:e>
-                                              <m:sub>
-                                                <m:r>
-                                                  <a:rPr lang="pt-BR" sz="3200" i="1">
-                                                    <a:latin typeface="Cambria Math" panose="02040503050406030204" pitchFamily="18" charset="0"/>
-                                                  </a:rPr>
-                                                  <m:t>1</m:t>
-                                                </m:r>
-                                                <m:r>
-                                                  <a:rPr lang="pt-BR" sz="3200" b="0" i="1" smtClean="0">
-                                                    <a:latin typeface="Cambria Math" panose="02040503050406030204" pitchFamily="18" charset="0"/>
-                                                  </a:rPr>
-                                                  <m:t>2</m:t>
-                                                </m:r>
-                                              </m:sub>
-                                            </m:sSub>
-                                          </m:e>
-                                        </m:mr>
-                                      </m:m>
-                                    </m:e>
-                                  </m:mr>
-                                  <m:mr>
-                                    <m:e>
-                                      <m:m>
-                                        <m:mPr>
-                                          <m:mcs>
-                                            <m:mc>
-                                              <m:mcPr>
-                                                <m:count m:val="2"/>
-                                                <m:mcJc m:val="center"/>
-                                              </m:mcPr>
-                                            </m:mc>
-                                          </m:mcs>
-                                          <m:ctrlPr>
-                                            <a:rPr lang="pt-BR" sz="3200" b="0" i="1" smtClean="0">
-                                              <a:latin typeface="Cambria Math" panose="02040503050406030204" pitchFamily="18" charset="0"/>
-                                            </a:rPr>
-                                          </m:ctrlPr>
-                                        </m:mPr>
-                                        <m:mr>
-                                          <m:e>
-                                            <m:sSub>
-                                              <m:sSubPr>
-                                                <m:ctrlPr>
-                                                  <a:rPr lang="pt-BR" sz="3200" i="1">
-                                                    <a:latin typeface="Cambria Math" panose="02040503050406030204" pitchFamily="18" charset="0"/>
-                                                  </a:rPr>
-                                                </m:ctrlPr>
-                                              </m:sSubPr>
-                                              <m:e>
-                                                <m:r>
-                                                  <a:rPr lang="pt-BR" sz="3200" i="1">
-                                                    <a:latin typeface="Cambria Math" panose="02040503050406030204" pitchFamily="18" charset="0"/>
-                                                  </a:rPr>
-                                                  <m:t>𝐶</m:t>
-                                                </m:r>
-                                              </m:e>
-                                              <m:sub>
-                                                <m:r>
-                                                  <a:rPr lang="pt-BR" sz="3200" b="0" i="1" smtClean="0">
-                                                    <a:latin typeface="Cambria Math" panose="02040503050406030204" pitchFamily="18" charset="0"/>
-                                                  </a:rPr>
-                                                  <m:t>2</m:t>
-                                                </m:r>
-                                                <m:r>
-                                                  <a:rPr lang="pt-BR" sz="3200" i="1">
-                                                    <a:latin typeface="Cambria Math" panose="02040503050406030204" pitchFamily="18" charset="0"/>
-                                                  </a:rPr>
-                                                  <m:t>1</m:t>
-                                                </m:r>
-                                              </m:sub>
-                                            </m:sSub>
-                                          </m:e>
-                                          <m:e>
-                                            <m:sSub>
-                                              <m:sSubPr>
-                                                <m:ctrlPr>
-                                                  <a:rPr lang="pt-BR" sz="3200" i="1">
-                                                    <a:latin typeface="Cambria Math" panose="02040503050406030204" pitchFamily="18" charset="0"/>
-                                                  </a:rPr>
-                                                </m:ctrlPr>
-                                              </m:sSubPr>
-                                              <m:e>
-                                                <m:r>
-                                                  <a:rPr lang="pt-BR" sz="3200" i="1">
-                                                    <a:latin typeface="Cambria Math" panose="02040503050406030204" pitchFamily="18" charset="0"/>
-                                                  </a:rPr>
-                                                  <m:t>𝐶</m:t>
-                                                </m:r>
-                                              </m:e>
-                                              <m:sub>
-                                                <m:r>
-                                                  <a:rPr lang="pt-BR" sz="3200" b="0" i="1" smtClean="0">
-                                                    <a:latin typeface="Cambria Math" panose="02040503050406030204" pitchFamily="18" charset="0"/>
-                                                  </a:rPr>
-                                                  <m:t>22</m:t>
-                                                </m:r>
-                                              </m:sub>
-                                            </m:sSub>
-                                          </m:e>
-                                        </m:mr>
-                                      </m:m>
-                                    </m:e>
-                                  </m:mr>
-                                </m:m>
-                              </m:e>
-                              <m:e>
-                                <m:r>
-                                  <a:rPr lang="pt-BR" sz="3200" b="0" i="1" smtClean="0">
-                                    <a:latin typeface="Cambria Math" panose="02040503050406030204" pitchFamily="18" charset="0"/>
-                                  </a:rPr>
-                                  <m:t>⋯</m:t>
-                                </m:r>
-                              </m:e>
-                              <m:e>
-                                <m:m>
-                                  <m:mPr>
-                                    <m:mcs>
-                                      <m:mc>
-                                        <m:mcPr>
-                                          <m:count m:val="1"/>
-                                          <m:mcJc m:val="center"/>
-                                        </m:mcPr>
-                                      </m:mc>
-                                    </m:mcs>
-                                    <m:ctrlPr>
-                                      <a:rPr lang="pt-BR" sz="3200" b="0" i="1" smtClean="0">
-                                        <a:latin typeface="Cambria Math" panose="02040503050406030204" pitchFamily="18" charset="0"/>
-                                      </a:rPr>
-                                    </m:ctrlPr>
-                                  </m:mPr>
-                                  <m:mr>
-                                    <m:e>
-                                      <m:sSub>
-                                        <m:sSubPr>
-                                          <m:ctrlPr>
-                                            <a:rPr lang="pt-BR" sz="3200" i="1">
-                                              <a:latin typeface="Cambria Math" panose="02040503050406030204" pitchFamily="18" charset="0"/>
-                                            </a:rPr>
-                                          </m:ctrlPr>
-                                        </m:sSubPr>
-                                        <m:e>
-                                          <m:r>
-                                            <a:rPr lang="pt-BR" sz="3200" i="1">
-                                              <a:latin typeface="Cambria Math" panose="02040503050406030204" pitchFamily="18" charset="0"/>
-                                            </a:rPr>
-                                            <m:t>𝐶</m:t>
-                                          </m:r>
-                                        </m:e>
-                                        <m:sub>
-                                          <m:r>
-                                            <a:rPr lang="pt-BR" sz="3200" i="1">
-                                              <a:latin typeface="Cambria Math" panose="02040503050406030204" pitchFamily="18" charset="0"/>
-                                            </a:rPr>
-                                            <m:t>1</m:t>
-                                          </m:r>
-                                          <m:r>
-                                            <a:rPr lang="pt-BR" sz="3200" i="1">
-                                              <a:latin typeface="Cambria Math" panose="02040503050406030204" pitchFamily="18" charset="0"/>
-                                            </a:rPr>
-                                            <m:t>𝑄</m:t>
-                                          </m:r>
-                                        </m:sub>
-                                      </m:sSub>
-                                    </m:e>
-                                  </m:mr>
-                                  <m:mr>
-                                    <m:e>
-                                      <m:sSub>
-                                        <m:sSubPr>
-                                          <m:ctrlPr>
-                                            <a:rPr lang="pt-BR" sz="3200" i="1">
-                                              <a:latin typeface="Cambria Math" panose="02040503050406030204" pitchFamily="18" charset="0"/>
-                                            </a:rPr>
-                                          </m:ctrlPr>
-                                        </m:sSubPr>
-                                        <m:e>
-                                          <m:r>
-                                            <a:rPr lang="pt-BR" sz="3200" i="1">
-                                              <a:latin typeface="Cambria Math" panose="02040503050406030204" pitchFamily="18" charset="0"/>
-                                            </a:rPr>
-                                            <m:t>𝐶</m:t>
-                                          </m:r>
-                                        </m:e>
-                                        <m:sub>
-                                          <m:r>
-                                            <a:rPr lang="pt-BR" sz="3200" b="0" i="1" smtClean="0">
-                                              <a:latin typeface="Cambria Math" panose="02040503050406030204" pitchFamily="18" charset="0"/>
-                                            </a:rPr>
-                                            <m:t>2</m:t>
-                                          </m:r>
-                                          <m:r>
-                                            <a:rPr lang="pt-BR" sz="3200" i="1">
-                                              <a:latin typeface="Cambria Math" panose="02040503050406030204" pitchFamily="18" charset="0"/>
-                                            </a:rPr>
-                                            <m:t>𝑄</m:t>
-                                          </m:r>
-                                        </m:sub>
-                                      </m:sSub>
-                                    </m:e>
-                                  </m:mr>
-                                </m:m>
-                              </m:e>
-                            </m:mr>
-                            <m:mr>
-                              <m:e>
-                                <m:r>
-                                  <a:rPr lang="pt-BR" sz="3200" b="0" i="1" smtClean="0">
-                                    <a:latin typeface="Cambria Math" panose="02040503050406030204" pitchFamily="18" charset="0"/>
-                                  </a:rPr>
-                                  <m:t>⋮</m:t>
-                                </m:r>
-                              </m:e>
-                              <m:e>
-                                <m:r>
-                                  <a:rPr lang="pt-BR" sz="3200" b="0" i="1" smtClean="0">
-                                    <a:latin typeface="Cambria Math" panose="02040503050406030204" pitchFamily="18" charset="0"/>
-                                  </a:rPr>
-                                  <m:t>⋱</m:t>
-                                </m:r>
-                              </m:e>
-                              <m:e>
-                                <m:r>
-                                  <a:rPr lang="pt-BR" sz="3200" b="0" i="1" smtClean="0">
-                                    <a:latin typeface="Cambria Math" panose="02040503050406030204" pitchFamily="18" charset="0"/>
-                                  </a:rPr>
-                                  <m:t>⋮</m:t>
-                                </m:r>
-                              </m:e>
-                            </m:mr>
-                            <m:mr>
-                              <m:e>
-                                <m:m>
-                                  <m:mPr>
-                                    <m:mcs>
-                                      <m:mc>
-                                        <m:mcPr>
-                                          <m:count m:val="2"/>
-                                          <m:mcJc m:val="center"/>
-                                        </m:mcPr>
-                                      </m:mc>
-                                    </m:mcs>
-                                    <m:ctrlPr>
-                                      <a:rPr lang="pt-BR" sz="3200" b="0" i="1" smtClean="0">
-                                        <a:latin typeface="Cambria Math" panose="02040503050406030204" pitchFamily="18" charset="0"/>
-                                      </a:rPr>
-                                    </m:ctrlPr>
-                                  </m:mPr>
-                                  <m:mr>
-                                    <m:e>
-                                      <m:sSub>
-                                        <m:sSubPr>
-                                          <m:ctrlPr>
-                                            <a:rPr lang="pt-BR" sz="3200" i="1">
-                                              <a:latin typeface="Cambria Math" panose="02040503050406030204" pitchFamily="18" charset="0"/>
-                                            </a:rPr>
-                                          </m:ctrlPr>
-                                        </m:sSubPr>
-                                        <m:e>
-                                          <m:r>
-                                            <a:rPr lang="pt-BR" sz="3200" i="1">
-                                              <a:latin typeface="Cambria Math" panose="02040503050406030204" pitchFamily="18" charset="0"/>
-                                            </a:rPr>
-                                            <m:t>𝐶</m:t>
-                                          </m:r>
-                                        </m:e>
-                                        <m:sub>
-                                          <m:r>
-                                            <a:rPr lang="pt-BR" sz="3200" b="0" i="1" smtClean="0">
-                                              <a:latin typeface="Cambria Math" panose="02040503050406030204" pitchFamily="18" charset="0"/>
-                                            </a:rPr>
-                                            <m:t>𝑄</m:t>
-                                          </m:r>
-                                          <m:r>
-                                            <a:rPr lang="pt-BR" sz="3200" i="1">
-                                              <a:latin typeface="Cambria Math" panose="02040503050406030204" pitchFamily="18" charset="0"/>
-                                            </a:rPr>
-                                            <m:t>1</m:t>
-                                          </m:r>
-                                        </m:sub>
-                                      </m:sSub>
-                                    </m:e>
-                                    <m:e>
-                                      <m:sSub>
-                                        <m:sSubPr>
-                                          <m:ctrlPr>
-                                            <a:rPr lang="pt-BR" sz="3200" i="1">
-                                              <a:latin typeface="Cambria Math" panose="02040503050406030204" pitchFamily="18" charset="0"/>
-                                            </a:rPr>
-                                          </m:ctrlPr>
-                                        </m:sSubPr>
-                                        <m:e>
-                                          <m:r>
-                                            <a:rPr lang="pt-BR" sz="3200" i="1">
-                                              <a:latin typeface="Cambria Math" panose="02040503050406030204" pitchFamily="18" charset="0"/>
-                                            </a:rPr>
-                                            <m:t>𝐶</m:t>
-                                          </m:r>
-                                        </m:e>
-                                        <m:sub>
-                                          <m:r>
-                                            <a:rPr lang="pt-BR" sz="3200" b="0" i="1" smtClean="0">
-                                              <a:latin typeface="Cambria Math" panose="02040503050406030204" pitchFamily="18" charset="0"/>
-                                            </a:rPr>
-                                            <m:t>𝑄</m:t>
-                                          </m:r>
-                                          <m:r>
-                                            <a:rPr lang="pt-BR" sz="3200" b="0" i="1" smtClean="0">
-                                              <a:latin typeface="Cambria Math" panose="02040503050406030204" pitchFamily="18" charset="0"/>
-                                            </a:rPr>
-                                            <m:t>2</m:t>
-                                          </m:r>
-                                        </m:sub>
-                                      </m:sSub>
-                                    </m:e>
-                                  </m:mr>
-                                </m:m>
-                              </m:e>
-                              <m:e>
-                                <m:r>
-                                  <a:rPr lang="pt-BR" sz="3200" b="0" i="1" smtClean="0">
-                                    <a:latin typeface="Cambria Math" panose="02040503050406030204" pitchFamily="18" charset="0"/>
-                                  </a:rPr>
-                                  <m:t>⋯</m:t>
-                                </m:r>
-                              </m:e>
-                              <m:e>
-                                <m:sSub>
-                                  <m:sSubPr>
-                                    <m:ctrlPr>
-                                      <a:rPr lang="pt-BR" sz="3200" i="1">
-                                        <a:latin typeface="Cambria Math" panose="02040503050406030204" pitchFamily="18" charset="0"/>
-                                      </a:rPr>
-                                    </m:ctrlPr>
-                                  </m:sSubPr>
-                                  <m:e>
-                                    <m:r>
-                                      <a:rPr lang="pt-BR" sz="3200" i="1">
-                                        <a:latin typeface="Cambria Math" panose="02040503050406030204" pitchFamily="18" charset="0"/>
-                                      </a:rPr>
-                                      <m:t>𝐶</m:t>
-                                    </m:r>
-                                  </m:e>
-                                  <m:sub>
-                                    <m:r>
-                                      <a:rPr lang="pt-BR" sz="3200" b="0" i="1" smtClean="0">
-                                        <a:latin typeface="Cambria Math" panose="02040503050406030204" pitchFamily="18" charset="0"/>
-                                      </a:rPr>
-                                      <m:t>𝑄</m:t>
-                                    </m:r>
-                                    <m:r>
-                                      <a:rPr lang="pt-BR" sz="3200" i="1">
-                                        <a:latin typeface="Cambria Math" panose="02040503050406030204" pitchFamily="18" charset="0"/>
-                                      </a:rPr>
-                                      <m:t>𝑄</m:t>
-                                    </m:r>
-                                  </m:sub>
-                                </m:sSub>
-                              </m:e>
-                            </m:mr>
-                          </m:m>
-                        </m:e>
-                      </m:d>
-                    </m:oMath>
-                  </m:oMathPara>
-                </a14:m>
-                <a:endParaRPr lang="pt-BR" sz="2400" dirty="0"/>
-              </a:p>
-            </p:txBody>
-          </p:sp>
-        </mc:Choice>
-        <mc:Fallback xmlns="">
-          <p:sp>
-            <p:nvSpPr>
-              <p:cNvPr id="5" name="CaixaDeTexto 4">
-                <a:extLst>
-                  <a:ext uri="{FF2B5EF4-FFF2-40B4-BE49-F238E27FC236}">
-                    <a16:creationId xmlns:a16="http://schemas.microsoft.com/office/drawing/2014/main" id="{9FE2C07F-02D2-0345-E394-150F01C017C4}"/>
-                  </a:ext>
-                </a:extLst>
-              </p:cNvPr>
-              <p:cNvSpPr txBox="1">
-                <a:spLocks noRot="1" noChangeAspect="1" noMove="1" noResize="1" noEditPoints="1" noAdjustHandles="1" noChangeArrowheads="1" noChangeShapeType="1" noTextEdit="1"/>
-              </p:cNvSpPr>
-              <p:nvPr/>
-            </p:nvSpPr>
-            <p:spPr>
-              <a:xfrm>
-                <a:off x="4114741" y="2367844"/>
-                <a:ext cx="4854223" cy="2122312"/>
-              </a:xfrm>
-              <a:prstGeom prst="rect">
-                <a:avLst/>
-              </a:prstGeom>
-              <a:blipFill>
-                <a:blip r:embed="rId3"/>
-                <a:stretch>
-                  <a:fillRect/>
-                </a:stretch>
-              </a:blipFill>
-            </p:spPr>
-            <p:txBody>
-              <a:bodyPr/>
-              <a:lstStyle/>
-              <a:p>
-                <a:r>
-                  <a:rPr lang="pt-BR">
-                    <a:noFill/>
-                  </a:rPr>
-                  <a:t> </a:t>
-                </a:r>
-              </a:p>
-            </p:txBody>
-          </p:sp>
-        </mc:Fallback>
-      </mc:AlternateContent>
-      <p:sp>
-        <p:nvSpPr>
-          <p:cNvPr id="4" name="Chave Direita 3">
-            <a:extLst>
-              <a:ext uri="{FF2B5EF4-FFF2-40B4-BE49-F238E27FC236}">
-                <a16:creationId xmlns:a16="http://schemas.microsoft.com/office/drawing/2014/main" id="{314F6830-34E9-8654-9AF0-D69DE9FAE980}"/>
-              </a:ext>
-            </a:extLst>
-          </p:cNvPr>
-          <p:cNvSpPr/>
-          <p:nvPr/>
-        </p:nvSpPr>
-        <p:spPr>
-          <a:xfrm rot="16200000" flipH="1">
-            <a:off x="6371397" y="2963136"/>
-            <a:ext cx="340913" cy="3394954"/>
-          </a:xfrm>
-          <a:prstGeom prst="rightBrace">
-            <a:avLst/>
-          </a:prstGeom>
-        </p:spPr>
-        <p:style>
-          <a:lnRef idx="1">
-            <a:schemeClr val="accent1"/>
-          </a:lnRef>
-          <a:fillRef idx="0">
-            <a:schemeClr val="accent1"/>
-          </a:fillRef>
-          <a:effectRef idx="0">
-            <a:schemeClr val="accent1"/>
-          </a:effectRef>
-          <a:fontRef idx="minor">
-            <a:schemeClr val="tx1"/>
-          </a:fontRef>
-        </p:style>
-        <p:txBody>
-          <a:bodyPr rtlCol="0" anchor="ctr"/>
-          <a:lstStyle/>
-          <a:p>
-            <a:pPr algn="ctr"/>
-            <a:endParaRPr lang="pt-BR"/>
-          </a:p>
-        </p:txBody>
-      </p:sp>
-      <p:sp>
-        <p:nvSpPr>
-          <p:cNvPr id="6" name="CaixaDeTexto 5">
-            <a:extLst>
-              <a:ext uri="{FF2B5EF4-FFF2-40B4-BE49-F238E27FC236}">
-                <a16:creationId xmlns:a16="http://schemas.microsoft.com/office/drawing/2014/main" id="{AA46DBC8-FBDE-250B-240D-193F0A609C0C}"/>
-              </a:ext>
-            </a:extLst>
-          </p:cNvPr>
-          <p:cNvSpPr txBox="1"/>
-          <p:nvPr/>
-        </p:nvSpPr>
-        <p:spPr>
-          <a:xfrm>
-            <a:off x="4844376" y="4846951"/>
-            <a:ext cx="3394955" cy="646331"/>
-          </a:xfrm>
-          <a:prstGeom prst="rect">
-            <a:avLst/>
-          </a:prstGeom>
-          <a:noFill/>
-        </p:spPr>
-        <p:txBody>
-          <a:bodyPr wrap="square" rtlCol="0">
-            <a:spAutoFit/>
-          </a:bodyPr>
-          <a:lstStyle/>
-          <a:p>
-            <a:pPr algn="ctr"/>
-            <a:r>
-              <a:rPr lang="pt-BR" b="1" i="1" dirty="0">
-                <a:solidFill>
-                  <a:srgbClr val="00B050"/>
-                </a:solidFill>
-              </a:rPr>
-              <a:t>Rótulos</a:t>
-            </a:r>
-            <a:r>
-              <a:rPr lang="pt-BR" dirty="0"/>
-              <a:t>: classes a que realmente pertencem os exemplos</a:t>
-            </a:r>
-          </a:p>
-        </p:txBody>
-      </p:sp>
-      <p:sp>
-        <p:nvSpPr>
-          <p:cNvPr id="7" name="Chave Direita 6">
-            <a:extLst>
-              <a:ext uri="{FF2B5EF4-FFF2-40B4-BE49-F238E27FC236}">
-                <a16:creationId xmlns:a16="http://schemas.microsoft.com/office/drawing/2014/main" id="{E94D5995-3604-C1B4-B485-9B393568D39B}"/>
-              </a:ext>
-            </a:extLst>
-          </p:cNvPr>
-          <p:cNvSpPr/>
-          <p:nvPr/>
-        </p:nvSpPr>
-        <p:spPr>
-          <a:xfrm flipH="1">
-            <a:off x="4172678" y="2509734"/>
-            <a:ext cx="340913" cy="1838528"/>
-          </a:xfrm>
-          <a:prstGeom prst="rightBrace">
-            <a:avLst/>
-          </a:prstGeom>
-        </p:spPr>
-        <p:style>
-          <a:lnRef idx="1">
-            <a:schemeClr val="accent1"/>
-          </a:lnRef>
-          <a:fillRef idx="0">
-            <a:schemeClr val="accent1"/>
-          </a:fillRef>
-          <a:effectRef idx="0">
-            <a:schemeClr val="accent1"/>
-          </a:effectRef>
-          <a:fontRef idx="minor">
-            <a:schemeClr val="tx1"/>
-          </a:fontRef>
-        </p:style>
-        <p:txBody>
-          <a:bodyPr rtlCol="0" anchor="ctr"/>
-          <a:lstStyle/>
-          <a:p>
-            <a:pPr algn="ctr"/>
-            <a:endParaRPr lang="pt-BR"/>
-          </a:p>
-        </p:txBody>
-      </p:sp>
-      <p:sp>
-        <p:nvSpPr>
-          <p:cNvPr id="8" name="CaixaDeTexto 7">
-            <a:extLst>
-              <a:ext uri="{FF2B5EF4-FFF2-40B4-BE49-F238E27FC236}">
-                <a16:creationId xmlns:a16="http://schemas.microsoft.com/office/drawing/2014/main" id="{AF3B44CB-FB5A-9774-1C6B-808D8FC9AA1C}"/>
-              </a:ext>
-            </a:extLst>
-          </p:cNvPr>
-          <p:cNvSpPr txBox="1"/>
-          <p:nvPr/>
-        </p:nvSpPr>
-        <p:spPr>
-          <a:xfrm>
-            <a:off x="1381327" y="3105832"/>
-            <a:ext cx="2733414" cy="646331"/>
-          </a:xfrm>
-          <a:prstGeom prst="rect">
-            <a:avLst/>
-          </a:prstGeom>
-          <a:noFill/>
-        </p:spPr>
-        <p:txBody>
-          <a:bodyPr wrap="square" rtlCol="0">
-            <a:spAutoFit/>
-          </a:bodyPr>
-          <a:lstStyle/>
-          <a:p>
-            <a:pPr algn="ctr"/>
-            <a:r>
-              <a:rPr lang="pt-BR" b="1" i="1" dirty="0">
-                <a:solidFill>
-                  <a:srgbClr val="00B050"/>
-                </a:solidFill>
-              </a:rPr>
-              <a:t>Predições</a:t>
-            </a:r>
-            <a:r>
-              <a:rPr lang="pt-BR" dirty="0"/>
-              <a:t>: classes a que os exemplos foram atribuídos</a:t>
-            </a:r>
-          </a:p>
-        </p:txBody>
-      </p:sp>
-    </p:spTree>
-    <p:extLst>
-      <p:ext uri="{BB962C8B-B14F-4D97-AF65-F5344CB8AC3E}">
-        <p14:creationId xmlns:p14="http://schemas.microsoft.com/office/powerpoint/2010/main" val="4252130408"/>
-      </p:ext>
-    </p:extLst>
-  </p:cSld>
-  <p:clrMapOvr>
-    <a:masterClrMapping/>
-  </p:clrMapOvr>
-</p:sld>
-</file>
-
 <file path=ppt/slides/slide7.xml><?xml version="1.0" encoding="utf-8"?>
 <p:sld xmlns:a="http://schemas.openxmlformats.org/drawingml/2006/main" xmlns:r="http://schemas.openxmlformats.org/officeDocument/2006/relationships" xmlns:p="http://schemas.openxmlformats.org/presentationml/2006/main">
   <p:cSld>
@@ -31486,8 +31675,8 @@
           </p:sp>
         </mc:Fallback>
       </mc:AlternateContent>
-      <mc:AlternateContent xmlns:mc="http://schemas.openxmlformats.org/markup-compatibility/2006">
-        <mc:Choice xmlns:a14="http://schemas.microsoft.com/office/drawing/2010/main" Requires="a14">
+      <mc:AlternateContent xmlns:mc="http://schemas.openxmlformats.org/markup-compatibility/2006" xmlns:a14="http://schemas.microsoft.com/office/drawing/2010/main">
+        <mc:Choice Requires="a14">
           <p:sp>
             <p:nvSpPr>
               <p:cNvPr id="3" name="Espaço Reservado para Conteúdo 2">
@@ -31624,7 +31813,7 @@
             </p:txBody>
           </p:sp>
         </mc:Choice>
-        <mc:Fallback>
+        <mc:Fallback xmlns="">
           <p:sp>
             <p:nvSpPr>
               <p:cNvPr id="3" name="Espaço Reservado para Conteúdo 2">
@@ -32571,8 +32760,8 @@
           </p:sp>
         </mc:Fallback>
       </mc:AlternateContent>
-      <mc:AlternateContent xmlns:mc="http://schemas.openxmlformats.org/markup-compatibility/2006">
-        <mc:Choice xmlns:a14="http://schemas.microsoft.com/office/drawing/2010/main" Requires="a14">
+      <mc:AlternateContent xmlns:mc="http://schemas.openxmlformats.org/markup-compatibility/2006" xmlns:a14="http://schemas.microsoft.com/office/drawing/2010/main">
+        <mc:Choice Requires="a14">
           <p:sp>
             <p:nvSpPr>
               <p:cNvPr id="14" name="CaixaDeTexto 13">
@@ -32657,7 +32846,7 @@
             </p:txBody>
           </p:sp>
         </mc:Choice>
-        <mc:Fallback>
+        <mc:Fallback xmlns="">
           <p:sp>
             <p:nvSpPr>
               <p:cNvPr id="14" name="CaixaDeTexto 13">
